--- a/classes/parte-3-estadistica-inferencial/175-distribuciones-normal-binomial-poisson-exponencial/clase-175-distribuciones-normal-binomial-poisson-exponencial-presentacion.pptx
+++ b/classes/parte-3-estadistica-inferencial/175-distribuciones-normal-binomial-poisson-exponencial/clase-175-distribuciones-normal-binomial-poisson-exponencial-presentacion.pptx
@@ -4823,7 +4823,7 @@
                 </a:solidFill>
                 <a:latin typeface="Segoe UI"/>
               </a:rPr>
-              <a:t>Primer bloque ejecutable del notebook.</a:t>
+              <a:t>Simétrica, soporte en toda la recta. Base de t-test, ANOVA e intervalos de confianza. Verificamos la regla 68-95-99.7.</a:t>
             </a:r>
           </a:p>
         </p:txBody>
@@ -4910,7 +4910,387 @@
                 </a:solidFill>
                 <a:latin typeface="Courier New"/>
               </a:rPr>
-              <a:t># Imports y configuración inicial</a:t>
+              <a:t>import numpy as np</a:t>
+            </a:r>
+          </a:p>
+          <a:p>
+            <a:pPr>
+              <a:defRPr sz="1200" b="0">
+                <a:solidFill>
+                  <a:srgbClr val="F8FAFC"/>
+                </a:solidFill>
+                <a:latin typeface="Courier New"/>
+              </a:defRPr>
+            </a:pPr>
+            <a:r>
+              <a:rPr sz="1200" b="0">
+                <a:solidFill>
+                  <a:srgbClr val="F8FAFC"/>
+                </a:solidFill>
+                <a:latin typeface="Courier New"/>
+              </a:rPr>
+              <a:t>from scipy import stats</a:t>
+            </a:r>
+          </a:p>
+          <a:p>
+            <a:pPr>
+              <a:defRPr sz="1200" b="0">
+                <a:solidFill>
+                  <a:srgbClr val="F8FAFC"/>
+                </a:solidFill>
+                <a:latin typeface="Courier New"/>
+              </a:defRPr>
+            </a:pPr>
+            <a:r>
+              <a:rPr sz="1200" b="0">
+                <a:solidFill>
+                  <a:srgbClr val="F8FAFC"/>
+                </a:solidFill>
+                <a:latin typeface="Courier New"/>
+              </a:rPr>
+              <a:t>import matplotlib.pyplot as plt</a:t>
+            </a:r>
+          </a:p>
+          <a:p>
+            <a:pPr>
+              <a:defRPr sz="1200" b="0">
+                <a:solidFill>
+                  <a:srgbClr val="F8FAFC"/>
+                </a:solidFill>
+                <a:latin typeface="Courier New"/>
+              </a:defRPr>
+            </a:pPr>
+            <a:r>
+              <a:rPr sz="1200" b="0">
+                <a:solidFill>
+                  <a:srgbClr val="F8FAFC"/>
+                </a:solidFill>
+                <a:latin typeface="Courier New"/>
+              </a:rPr>
+              <a:t> </a:t>
+            </a:r>
+          </a:p>
+          <a:p>
+            <a:pPr>
+              <a:defRPr sz="1200" b="0">
+                <a:solidFill>
+                  <a:srgbClr val="F8FAFC"/>
+                </a:solidFill>
+                <a:latin typeface="Courier New"/>
+              </a:defRPr>
+            </a:pPr>
+            <a:r>
+              <a:rPr sz="1200" b="0">
+                <a:solidFill>
+                  <a:srgbClr val="F8FAFC"/>
+                </a:solidFill>
+                <a:latin typeface="Courier New"/>
+              </a:rPr>
+              <a:t>rng = np.random.default_rng(42)</a:t>
+            </a:r>
+          </a:p>
+          <a:p>
+            <a:pPr>
+              <a:defRPr sz="1200" b="0">
+                <a:solidFill>
+                  <a:srgbClr val="F8FAFC"/>
+                </a:solidFill>
+                <a:latin typeface="Courier New"/>
+              </a:defRPr>
+            </a:pPr>
+            <a:r>
+              <a:rPr sz="1200" b="0">
+                <a:solidFill>
+                  <a:srgbClr val="F8FAFC"/>
+                </a:solidFill>
+                <a:latin typeface="Courier New"/>
+              </a:rPr>
+              <a:t>np.random.seed(42)</a:t>
+            </a:r>
+          </a:p>
+          <a:p>
+            <a:pPr>
+              <a:defRPr sz="1200" b="0">
+                <a:solidFill>
+                  <a:srgbClr val="F8FAFC"/>
+                </a:solidFill>
+                <a:latin typeface="Courier New"/>
+              </a:defRPr>
+            </a:pPr>
+            <a:r>
+              <a:rPr sz="1200" b="0">
+                <a:solidFill>
+                  <a:srgbClr val="F8FAFC"/>
+                </a:solidFill>
+                <a:latin typeface="Courier New"/>
+              </a:rPr>
+              <a:t> </a:t>
+            </a:r>
+          </a:p>
+          <a:p>
+            <a:pPr>
+              <a:defRPr sz="1200" b="0">
+                <a:solidFill>
+                  <a:srgbClr val="F8FAFC"/>
+                </a:solidFill>
+                <a:latin typeface="Courier New"/>
+              </a:defRPr>
+            </a:pPr>
+            <a:r>
+              <a:rPr sz="1200" b="0">
+                <a:solidFill>
+                  <a:srgbClr val="F8FAFC"/>
+                </a:solidFill>
+                <a:latin typeface="Courier New"/>
+              </a:rPr>
+              <a:t>mu, sigma = 100.0, 15.0</a:t>
+            </a:r>
+          </a:p>
+          <a:p>
+            <a:pPr>
+              <a:defRPr sz="1200" b="0">
+                <a:solidFill>
+                  <a:srgbClr val="F8FAFC"/>
+                </a:solidFill>
+                <a:latin typeface="Courier New"/>
+              </a:defRPr>
+            </a:pPr>
+            <a:r>
+              <a:rPr sz="1200" b="0">
+                <a:solidFill>
+                  <a:srgbClr val="F8FAFC"/>
+                </a:solidFill>
+                <a:latin typeface="Courier New"/>
+              </a:rPr>
+              <a:t>x = rng.normal(mu, sigma, 10_000)</a:t>
+            </a:r>
+          </a:p>
+          <a:p>
+            <a:pPr>
+              <a:defRPr sz="1200" b="0">
+                <a:solidFill>
+                  <a:srgbClr val="F8FAFC"/>
+                </a:solidFill>
+                <a:latin typeface="Courier New"/>
+              </a:defRPr>
+            </a:pPr>
+            <a:r>
+              <a:rPr sz="1200" b="0">
+                <a:solidFill>
+                  <a:srgbClr val="F8FAFC"/>
+                </a:solidFill>
+                <a:latin typeface="Courier New"/>
+              </a:rPr>
+              <a:t>print(f"Normal N(100, 15^2): media={x.mean():.2f}  sd={x.std(ddof=1):.2f}")</a:t>
+            </a:r>
+          </a:p>
+          <a:p>
+            <a:pPr>
+              <a:defRPr sz="1200" b="0">
+                <a:solidFill>
+                  <a:srgbClr val="F8FAFC"/>
+                </a:solidFill>
+                <a:latin typeface="Courier New"/>
+              </a:defRPr>
+            </a:pPr>
+            <a:r>
+              <a:rPr sz="1200" b="0">
+                <a:solidFill>
+                  <a:srgbClr val="F8FAFC"/>
+                </a:solidFill>
+                <a:latin typeface="Courier New"/>
+              </a:rPr>
+              <a:t> </a:t>
+            </a:r>
+          </a:p>
+          <a:p>
+            <a:pPr>
+              <a:defRPr sz="1200" b="0">
+                <a:solidFill>
+                  <a:srgbClr val="F8FAFC"/>
+                </a:solidFill>
+                <a:latin typeface="Courier New"/>
+              </a:defRPr>
+            </a:pPr>
+            <a:r>
+              <a:rPr sz="1200" b="0">
+                <a:solidFill>
+                  <a:srgbClr val="F8FAFC"/>
+                </a:solidFill>
+                <a:latin typeface="Courier New"/>
+              </a:rPr>
+              <a:t>for k in (1, 2, 3):</a:t>
+            </a:r>
+          </a:p>
+          <a:p>
+            <a:pPr>
+              <a:defRPr sz="1200" b="0">
+                <a:solidFill>
+                  <a:srgbClr val="F8FAFC"/>
+                </a:solidFill>
+                <a:latin typeface="Courier New"/>
+              </a:defRPr>
+            </a:pPr>
+            <a:r>
+              <a:rPr sz="1200" b="0">
+                <a:solidFill>
+                  <a:srgbClr val="F8FAFC"/>
+                </a:solidFill>
+                <a:latin typeface="Courier New"/>
+              </a:rPr>
+              <a:t>    frac = np.mean(np.abs(x - mu) &lt; k * sigma)</a:t>
+            </a:r>
+          </a:p>
+          <a:p>
+            <a:pPr>
+              <a:defRPr sz="1200" b="0">
+                <a:solidFill>
+                  <a:srgbClr val="F8FAFC"/>
+                </a:solidFill>
+                <a:latin typeface="Courier New"/>
+              </a:defRPr>
+            </a:pPr>
+            <a:r>
+              <a:rPr sz="1200" b="0">
+                <a:solidFill>
+                  <a:srgbClr val="F8FAFC"/>
+                </a:solidFill>
+                <a:latin typeface="Courier New"/>
+              </a:rPr>
+              <a:t>    print(f"  dentro de {k} sigma: {frac:.3f}")</a:t>
+            </a:r>
+          </a:p>
+          <a:p>
+            <a:pPr>
+              <a:defRPr sz="1200" b="0">
+                <a:solidFill>
+                  <a:srgbClr val="F8FAFC"/>
+                </a:solidFill>
+                <a:latin typeface="Courier New"/>
+              </a:defRPr>
+            </a:pPr>
+            <a:r>
+              <a:rPr sz="1200" b="0">
+                <a:solidFill>
+                  <a:srgbClr val="F8FAFC"/>
+                </a:solidFill>
+                <a:latin typeface="Courier New"/>
+              </a:rPr>
+              <a:t>frac1 = np.mean(np.abs(x - mu) &lt; sigma)</a:t>
+            </a:r>
+          </a:p>
+          <a:p>
+            <a:pPr>
+              <a:defRPr sz="1200" b="0">
+                <a:solidFill>
+                  <a:srgbClr val="F8FAFC"/>
+                </a:solidFill>
+                <a:latin typeface="Courier New"/>
+              </a:defRPr>
+            </a:pPr>
+            <a:r>
+              <a:rPr sz="1200" b="0">
+                <a:solidFill>
+                  <a:srgbClr val="F8FAFC"/>
+                </a:solidFill>
+                <a:latin typeface="Courier New"/>
+              </a:rPr>
+              <a:t>assert abs(frac1 - 0.683) &lt; 0.02, "la regla 68-95-99.7 debe cumplirse"</a:t>
+            </a:r>
+          </a:p>
+          <a:p>
+            <a:pPr>
+              <a:defRPr sz="1200" b="0">
+                <a:solidFill>
+                  <a:srgbClr val="F8FAFC"/>
+                </a:solidFill>
+                <a:latin typeface="Courier New"/>
+              </a:defRPr>
+            </a:pPr>
+            <a:r>
+              <a:rPr sz="1200" b="0">
+                <a:solidFill>
+                  <a:srgbClr val="F8FAFC"/>
+                </a:solidFill>
+                <a:latin typeface="Courier New"/>
+              </a:rPr>
+              <a:t> </a:t>
+            </a:r>
+          </a:p>
+          <a:p>
+            <a:pPr>
+              <a:defRPr sz="1200" b="0">
+                <a:solidFill>
+                  <a:srgbClr val="F8FAFC"/>
+                </a:solidFill>
+                <a:latin typeface="Courier New"/>
+              </a:defRPr>
+            </a:pPr>
+            <a:r>
+              <a:rPr sz="1200" b="0">
+                <a:solidFill>
+                  <a:srgbClr val="F8FAFC"/>
+                </a:solidFill>
+                <a:latin typeface="Courier New"/>
+              </a:rPr>
+              <a:t>grid = np.linspace(mu - 4*sigma, mu + 4*sigma, 200)</a:t>
+            </a:r>
+          </a:p>
+          <a:p>
+            <a:pPr>
+              <a:defRPr sz="1200" b="0">
+                <a:solidFill>
+                  <a:srgbClr val="F8FAFC"/>
+                </a:solidFill>
+                <a:latin typeface="Courier New"/>
+              </a:defRPr>
+            </a:pPr>
+            <a:r>
+              <a:rPr sz="1200" b="0">
+                <a:solidFill>
+                  <a:srgbClr val="F8FAFC"/>
+                </a:solidFill>
+                <a:latin typeface="Courier New"/>
+              </a:rPr>
+              <a:t>plt.figure(figsize=(7, 4))</a:t>
+            </a:r>
+          </a:p>
+          <a:p>
+            <a:pPr>
+              <a:defRPr sz="1200" b="0">
+                <a:solidFill>
+                  <a:srgbClr val="F8FAFC"/>
+                </a:solidFill>
+                <a:latin typeface="Courier New"/>
+              </a:defRPr>
+            </a:pPr>
+            <a:r>
+              <a:rPr sz="1200" b="0">
+                <a:solidFill>
+                  <a:srgbClr val="F8FAFC"/>
+                </a:solidFill>
+                <a:latin typeface="Courier New"/>
+              </a:rPr>
+              <a:t>plt.hist(x, bins=50, density=True, alpha=0.5, label="muestra")</a:t>
+            </a:r>
+          </a:p>
+          <a:p>
+            <a:pPr>
+              <a:defRPr sz="1200" b="0">
+                <a:solidFill>
+                  <a:srgbClr val="F8FAFC"/>
+                </a:solidFill>
+                <a:latin typeface="Courier New"/>
+              </a:defRPr>
+            </a:pPr>
+            <a:r>
+              <a:rPr sz="1200" b="0">
+                <a:solidFill>
+                  <a:srgbClr val="F8FAFC"/>
+                </a:solidFill>
+                <a:latin typeface="Courier New"/>
+              </a:rPr>
+              <a:t># ... (truncado)</a:t>
             </a:r>
           </a:p>
         </p:txBody>

--- a/classes/parte-3-estadistica-inferencial/175-distribuciones-normal-binomial-poisson-exponencial/clase-175-distribuciones-normal-binomial-poisson-exponencial-presentacion.pptx
+++ b/classes/parte-3-estadistica-inferencial/175-distribuciones-normal-binomial-poisson-exponencial/clase-175-distribuciones-normal-binomial-poisson-exponencial-presentacion.pptx
@@ -3272,7 +3272,7 @@
                 </a:solidFill>
                 <a:latin typeface="Segoe UI"/>
               </a:rPr>
-              <a:t>Parte: 3 — Estadística Inferencial y Causal · Fuente: ISLP, cap. 2 + Bruce &amp; Bruce, cap. 2 Data and Sampling Distributions.  Duración estimada: 70 min.</a:t>
+              <a:t>Parte: 3 — Estadística Inferencial y Causal · Fuente: ISLP, cap. 2 + Bruce &amp; Bruce, cap. 2 Data and Sampling Distributions.  Duración estimada: 70 min. · Nivel: Intermedio-Avanzado</a:t>
             </a:r>
           </a:p>
         </p:txBody>
@@ -3581,7 +3581,7 @@
                 </a:solidFill>
                 <a:latin typeface="Segoe UI"/>
               </a:rPr>
-              <a:t>Parte: 3 — Estadística Inferencial y Causal · Fuente: ISLP, cap. 2 + Bruce &amp; Bruce, cap. 2 Data and Sampling Distributions.  Duración estimada: 70 min.</a:t>
+              <a:t>Parte: 3 — Estadística Inferencial y Causal · Fuente: ISLP, cap. 2 + Bruce &amp; Bruce, cap. 2 Data and Sampling Distributions.  Duración estimada: 70 min. · Nivel: Intermedio-Avanzado</a:t>
             </a:r>
           </a:p>
         </p:txBody>
